--- a/assets/Sing Tank.pptx
+++ b/assets/Sing Tank.pptx
@@ -266,7 +266,7 @@
           <a:p>
             <a:fld id="{EDEBFD31-D109-4CE5-AA54-0D0D9EE57BF3}" type="datetimeFigureOut">
               <a:rPr lang="en-SG" smtClean="0"/>
-              <a:t>30/7/26</a:t>
+              <a:t>29/7/26</a:t>
             </a:fld>
             <a:endParaRPr lang="en-SG"/>
           </a:p>
@@ -466,7 +466,7 @@
           <a:p>
             <a:fld id="{EDEBFD31-D109-4CE5-AA54-0D0D9EE57BF3}" type="datetimeFigureOut">
               <a:rPr lang="en-SG" smtClean="0"/>
-              <a:t>30/7/26</a:t>
+              <a:t>29/7/26</a:t>
             </a:fld>
             <a:endParaRPr lang="en-SG"/>
           </a:p>
@@ -676,7 +676,7 @@
           <a:p>
             <a:fld id="{EDEBFD31-D109-4CE5-AA54-0D0D9EE57BF3}" type="datetimeFigureOut">
               <a:rPr lang="en-SG" smtClean="0"/>
-              <a:t>30/7/26</a:t>
+              <a:t>29/7/26</a:t>
             </a:fld>
             <a:endParaRPr lang="en-SG"/>
           </a:p>
@@ -876,7 +876,7 @@
           <a:p>
             <a:fld id="{EDEBFD31-D109-4CE5-AA54-0D0D9EE57BF3}" type="datetimeFigureOut">
               <a:rPr lang="en-SG" smtClean="0"/>
-              <a:t>30/7/26</a:t>
+              <a:t>29/7/26</a:t>
             </a:fld>
             <a:endParaRPr lang="en-SG"/>
           </a:p>
@@ -1152,7 +1152,7 @@
           <a:p>
             <a:fld id="{EDEBFD31-D109-4CE5-AA54-0D0D9EE57BF3}" type="datetimeFigureOut">
               <a:rPr lang="en-SG" smtClean="0"/>
-              <a:t>30/7/26</a:t>
+              <a:t>29/7/26</a:t>
             </a:fld>
             <a:endParaRPr lang="en-SG"/>
           </a:p>
@@ -1420,7 +1420,7 @@
           <a:p>
             <a:fld id="{EDEBFD31-D109-4CE5-AA54-0D0D9EE57BF3}" type="datetimeFigureOut">
               <a:rPr lang="en-SG" smtClean="0"/>
-              <a:t>30/7/26</a:t>
+              <a:t>29/7/26</a:t>
             </a:fld>
             <a:endParaRPr lang="en-SG"/>
           </a:p>
@@ -1835,7 +1835,7 @@
           <a:p>
             <a:fld id="{EDEBFD31-D109-4CE5-AA54-0D0D9EE57BF3}" type="datetimeFigureOut">
               <a:rPr lang="en-SG" smtClean="0"/>
-              <a:t>30/7/26</a:t>
+              <a:t>29/7/26</a:t>
             </a:fld>
             <a:endParaRPr lang="en-SG"/>
           </a:p>
@@ -1977,7 +1977,7 @@
           <a:p>
             <a:fld id="{EDEBFD31-D109-4CE5-AA54-0D0D9EE57BF3}" type="datetimeFigureOut">
               <a:rPr lang="en-SG" smtClean="0"/>
-              <a:t>30/7/26</a:t>
+              <a:t>29/7/26</a:t>
             </a:fld>
             <a:endParaRPr lang="en-SG"/>
           </a:p>
@@ -2090,7 +2090,7 @@
           <a:p>
             <a:fld id="{EDEBFD31-D109-4CE5-AA54-0D0D9EE57BF3}" type="datetimeFigureOut">
               <a:rPr lang="en-SG" smtClean="0"/>
-              <a:t>30/7/26</a:t>
+              <a:t>29/7/26</a:t>
             </a:fld>
             <a:endParaRPr lang="en-SG"/>
           </a:p>
@@ -2403,7 +2403,7 @@
           <a:p>
             <a:fld id="{EDEBFD31-D109-4CE5-AA54-0D0D9EE57BF3}" type="datetimeFigureOut">
               <a:rPr lang="en-SG" smtClean="0"/>
-              <a:t>30/7/26</a:t>
+              <a:t>29/7/26</a:t>
             </a:fld>
             <a:endParaRPr lang="en-SG"/>
           </a:p>
@@ -2692,7 +2692,7 @@
           <a:p>
             <a:fld id="{EDEBFD31-D109-4CE5-AA54-0D0D9EE57BF3}" type="datetimeFigureOut">
               <a:rPr lang="en-SG" smtClean="0"/>
-              <a:t>30/7/26</a:t>
+              <a:t>29/7/26</a:t>
             </a:fld>
             <a:endParaRPr lang="en-SG"/>
           </a:p>
@@ -2935,7 +2935,7 @@
           <a:p>
             <a:fld id="{EDEBFD31-D109-4CE5-AA54-0D0D9EE57BF3}" type="datetimeFigureOut">
               <a:rPr lang="en-SG" smtClean="0"/>
-              <a:t>30/7/26</a:t>
+              <a:t>29/7/26</a:t>
             </a:fld>
             <a:endParaRPr lang="en-SG"/>
           </a:p>
@@ -3468,14 +3468,14 @@
           <p:nvPr/>
         </p:nvPicPr>
         <p:blipFill>
-          <a:blip r:embed="rId3"/>
+          <a:blip/>
           <a:stretch>
             <a:fillRect/>
           </a:stretch>
         </p:blipFill>
         <p:spPr>
           <a:xfrm>
-            <a:off x="545862" y="1690688"/>
+            <a:off x="1078297" y="2627312"/>
             <a:ext cx="5017703" cy="3983610"/>
           </a:xfrm>
           <a:prstGeom prst="rect">
@@ -3556,14 +3556,14 @@
           <p:nvPr/>
         </p:nvPicPr>
         <p:blipFill>
-          <a:blip r:embed="rId2"/>
+          <a:blip/>
           <a:stretch>
             <a:fillRect/>
           </a:stretch>
         </p:blipFill>
         <p:spPr>
           <a:xfrm>
-            <a:off x="3529055" y="2796659"/>
+            <a:off x="4923528" y="2702461"/>
             <a:ext cx="6430272" cy="3696216"/>
           </a:xfrm>
           <a:prstGeom prst="rect">
@@ -3671,7 +3671,7 @@
           <p:nvPr/>
         </p:nvPicPr>
         <p:blipFill>
-          <a:blip r:embed="rId3">
+          <a:blip>
             <a:extLst>
               <a:ext uri="{28A0092B-C50C-407E-A947-70E740481C1C}">
                 <a14:useLocalDpi xmlns:a14="http://schemas.microsoft.com/office/drawing/2010/main" val="0"/>
@@ -3737,7 +3737,7 @@
           <p:nvPr/>
         </p:nvPicPr>
         <p:blipFill>
-          <a:blip r:embed="rId2"/>
+          <a:blip/>
           <a:stretch>
             <a:fillRect/>
           </a:stretch>
@@ -3767,7 +3767,7 @@
           <p:nvPr/>
         </p:nvPicPr>
         <p:blipFill>
-          <a:blip r:embed="rId3">
+          <a:blip r:embed="rId2">
             <a:extLst>
               <a:ext uri="{28A0092B-C50C-407E-A947-70E740481C1C}">
                 <a14:useLocalDpi xmlns:a14="http://schemas.microsoft.com/office/drawing/2010/main" val="0"/>
@@ -3983,7 +3983,7 @@
           <p:nvPr/>
         </p:nvPicPr>
         <p:blipFill>
-          <a:blip r:embed="rId2"/>
+          <a:blip/>
           <a:stretch>
             <a:fillRect/>
           </a:stretch>
@@ -4013,7 +4013,7 @@
           <p:nvPr/>
         </p:nvPicPr>
         <p:blipFill>
-          <a:blip r:embed="rId3">
+          <a:blip>
             <a:extLst>
               <a:ext uri="{28A0092B-C50C-407E-A947-70E740481C1C}">
                 <a14:useLocalDpi xmlns:a14="http://schemas.microsoft.com/office/drawing/2010/main" val="0"/>
